--- a/m4/diapositivos/sessao-06-m4-f10.pptx
+++ b/m4/diapositivos/sessao-06-m4-f10.pptx
@@ -1887,11 +1887,8 @@
                 <a:ea typeface="Georgia" pitchFamily="34" charset="-122"/>
                 <a:cs typeface="Georgia" pitchFamily="34" charset="-120"/>
               </a:rPr>
-              <a:t>Em grupos de dois ou três, escolham um peixe do Sermão (roncadores, pegadores, voadores, polvo: estão no cartão extra «Pegadores, voadores, polvo», no fim da lição).</a:t>
-            </a:r>
-            <a:endParaRPr lang="en-US" sz="2300" dirty="0"/>
-          </a:p>
-          <a:p>
+              <a:t>Em grupos de dois ou três, escolham um peixe do </a:t>
+            </a:r>
             <a:pPr indent="0" marL="0">
               <a:lnSpc>
                 <a:spcPct val="120000"/>
@@ -1902,7 +1899,7 @@
               <a:buNone/>
             </a:pPr>
             <a:r>
-              <a:rPr lang="en-US" sz="2300" dirty="0">
+              <a:rPr lang="en-US" sz="2300" i="1" dirty="0">
                 <a:solidFill>
                   <a:srgbClr val="F2F0EA"/>
                 </a:solidFill>
@@ -1910,7 +1907,250 @@
                 <a:ea typeface="Georgia" pitchFamily="34" charset="-122"/>
                 <a:cs typeface="Georgia" pitchFamily="34" charset="-120"/>
               </a:rPr>
-              <a:t>Em três a quatro minutos: 1. o que diz Vieira, com uma citação; 2. o recurso que torna a crítica eficaz; 3. um comportamento atual equivalente, sem visar pessoas reais; 4. resposta a uma objeção.</a:t>
+              <a:t>Sermão</a:t>
+            </a:r>
+            <a:pPr indent="0" marL="0">
+              <a:lnSpc>
+                <a:spcPct val="120000"/>
+              </a:lnSpc>
+              <a:spcAft>
+                <a:spcPts val="1000"/>
+              </a:spcAft>
+              <a:buNone/>
+            </a:pPr>
+            <a:r>
+              <a:rPr lang="en-US" sz="2300" dirty="0">
+                <a:solidFill>
+                  <a:srgbClr val="F2F0EA"/>
+                </a:solidFill>
+                <a:latin typeface="Georgia" pitchFamily="34" charset="0"/>
+                <a:ea typeface="Georgia" pitchFamily="34" charset="-122"/>
+                <a:cs typeface="Georgia" pitchFamily="34" charset="-120"/>
+              </a:rPr>
+              <a:t> (roncadores, pegadores, voadores, polvo: estão no cartão extra «Pegadores, voadores, polvo», no fim da lição).</a:t>
+            </a:r>
+            <a:endParaRPr lang="en-US" sz="2300" dirty="0"/>
+          </a:p>
+          <a:p>
+            <a:pPr indent="0" marL="0">
+              <a:lnSpc>
+                <a:spcPct val="120000"/>
+              </a:lnSpc>
+              <a:spcAft>
+                <a:spcPts val="1000"/>
+              </a:spcAft>
+              <a:buNone/>
+            </a:pPr>
+            <a:r>
+              <a:rPr lang="en-US" sz="2300" dirty="0">
+                <a:solidFill>
+                  <a:srgbClr val="F2F0EA"/>
+                </a:solidFill>
+                <a:latin typeface="Georgia" pitchFamily="34" charset="0"/>
+                <a:ea typeface="Georgia" pitchFamily="34" charset="-122"/>
+                <a:cs typeface="Georgia" pitchFamily="34" charset="-120"/>
+              </a:rPr>
+              <a:t>Em três a quatro minutos: </a:t>
+            </a:r>
+            <a:pPr indent="0" marL="0">
+              <a:lnSpc>
+                <a:spcPct val="120000"/>
+              </a:lnSpc>
+              <a:spcAft>
+                <a:spcPts val="1000"/>
+              </a:spcAft>
+              <a:buNone/>
+            </a:pPr>
+            <a:r>
+              <a:rPr lang="en-US" sz="2300" b="1" dirty="0">
+                <a:solidFill>
+                  <a:srgbClr val="F2F0EA"/>
+                </a:solidFill>
+                <a:latin typeface="Georgia" pitchFamily="34" charset="0"/>
+                <a:ea typeface="Georgia" pitchFamily="34" charset="-122"/>
+                <a:cs typeface="Georgia" pitchFamily="34" charset="-120"/>
+              </a:rPr>
+              <a:t>1.</a:t>
+            </a:r>
+            <a:pPr indent="0" marL="0">
+              <a:lnSpc>
+                <a:spcPct val="120000"/>
+              </a:lnSpc>
+              <a:spcAft>
+                <a:spcPts val="1000"/>
+              </a:spcAft>
+              <a:buNone/>
+            </a:pPr>
+            <a:r>
+              <a:rPr lang="en-US" sz="2300" dirty="0">
+                <a:solidFill>
+                  <a:srgbClr val="F2F0EA"/>
+                </a:solidFill>
+                <a:latin typeface="Georgia" pitchFamily="34" charset="0"/>
+                <a:ea typeface="Georgia" pitchFamily="34" charset="-122"/>
+                <a:cs typeface="Georgia" pitchFamily="34" charset="-120"/>
+              </a:rPr>
+              <a:t> o que diz Vieira, com uma citação; </a:t>
+            </a:r>
+            <a:pPr indent="0" marL="0">
+              <a:lnSpc>
+                <a:spcPct val="120000"/>
+              </a:lnSpc>
+              <a:spcAft>
+                <a:spcPts val="1000"/>
+              </a:spcAft>
+              <a:buNone/>
+            </a:pPr>
+            <a:r>
+              <a:rPr lang="en-US" sz="2300" b="1" dirty="0">
+                <a:solidFill>
+                  <a:srgbClr val="F2F0EA"/>
+                </a:solidFill>
+                <a:latin typeface="Georgia" pitchFamily="34" charset="0"/>
+                <a:ea typeface="Georgia" pitchFamily="34" charset="-122"/>
+                <a:cs typeface="Georgia" pitchFamily="34" charset="-120"/>
+              </a:rPr>
+              <a:t>2.</a:t>
+            </a:r>
+            <a:pPr indent="0" marL="0">
+              <a:lnSpc>
+                <a:spcPct val="120000"/>
+              </a:lnSpc>
+              <a:spcAft>
+                <a:spcPts val="1000"/>
+              </a:spcAft>
+              <a:buNone/>
+            </a:pPr>
+            <a:r>
+              <a:rPr lang="en-US" sz="2300" dirty="0">
+                <a:solidFill>
+                  <a:srgbClr val="F2F0EA"/>
+                </a:solidFill>
+                <a:latin typeface="Georgia" pitchFamily="34" charset="0"/>
+                <a:ea typeface="Georgia" pitchFamily="34" charset="-122"/>
+                <a:cs typeface="Georgia" pitchFamily="34" charset="-120"/>
+              </a:rPr>
+              <a:t> o recurso que torna a crítica eficaz; </a:t>
+            </a:r>
+            <a:pPr indent="0" marL="0">
+              <a:lnSpc>
+                <a:spcPct val="120000"/>
+              </a:lnSpc>
+              <a:spcAft>
+                <a:spcPts val="1000"/>
+              </a:spcAft>
+              <a:buNone/>
+            </a:pPr>
+            <a:r>
+              <a:rPr lang="en-US" sz="2300" b="1" dirty="0">
+                <a:solidFill>
+                  <a:srgbClr val="F2F0EA"/>
+                </a:solidFill>
+                <a:latin typeface="Georgia" pitchFamily="34" charset="0"/>
+                <a:ea typeface="Georgia" pitchFamily="34" charset="-122"/>
+                <a:cs typeface="Georgia" pitchFamily="34" charset="-120"/>
+              </a:rPr>
+              <a:t>3.</a:t>
+            </a:r>
+            <a:pPr indent="0" marL="0">
+              <a:lnSpc>
+                <a:spcPct val="120000"/>
+              </a:lnSpc>
+              <a:spcAft>
+                <a:spcPts val="1000"/>
+              </a:spcAft>
+              <a:buNone/>
+            </a:pPr>
+            <a:r>
+              <a:rPr lang="en-US" sz="2300" dirty="0">
+                <a:solidFill>
+                  <a:srgbClr val="F2F0EA"/>
+                </a:solidFill>
+                <a:latin typeface="Georgia" pitchFamily="34" charset="0"/>
+                <a:ea typeface="Georgia" pitchFamily="34" charset="-122"/>
+                <a:cs typeface="Georgia" pitchFamily="34" charset="-120"/>
+              </a:rPr>
+              <a:t> um comportamento atual equivalente, </a:t>
+            </a:r>
+            <a:pPr indent="0" marL="0">
+              <a:lnSpc>
+                <a:spcPct val="120000"/>
+              </a:lnSpc>
+              <a:spcAft>
+                <a:spcPts val="1000"/>
+              </a:spcAft>
+              <a:buNone/>
+            </a:pPr>
+            <a:r>
+              <a:rPr lang="en-US" sz="2300" b="1" dirty="0">
+                <a:solidFill>
+                  <a:srgbClr val="F2F0EA"/>
+                </a:solidFill>
+                <a:latin typeface="Georgia" pitchFamily="34" charset="0"/>
+                <a:ea typeface="Georgia" pitchFamily="34" charset="-122"/>
+                <a:cs typeface="Georgia" pitchFamily="34" charset="-120"/>
+              </a:rPr>
+              <a:t>sem visar pessoas reais</a:t>
+            </a:r>
+            <a:pPr indent="0" marL="0">
+              <a:lnSpc>
+                <a:spcPct val="120000"/>
+              </a:lnSpc>
+              <a:spcAft>
+                <a:spcPts val="1000"/>
+              </a:spcAft>
+              <a:buNone/>
+            </a:pPr>
+            <a:r>
+              <a:rPr lang="en-US" sz="2300" dirty="0">
+                <a:solidFill>
+                  <a:srgbClr val="F2F0EA"/>
+                </a:solidFill>
+                <a:latin typeface="Georgia" pitchFamily="34" charset="0"/>
+                <a:ea typeface="Georgia" pitchFamily="34" charset="-122"/>
+                <a:cs typeface="Georgia" pitchFamily="34" charset="-120"/>
+              </a:rPr>
+              <a:t>; </a:t>
+            </a:r>
+            <a:pPr indent="0" marL="0">
+              <a:lnSpc>
+                <a:spcPct val="120000"/>
+              </a:lnSpc>
+              <a:spcAft>
+                <a:spcPts val="1000"/>
+              </a:spcAft>
+              <a:buNone/>
+            </a:pPr>
+            <a:r>
+              <a:rPr lang="en-US" sz="2300" b="1" dirty="0">
+                <a:solidFill>
+                  <a:srgbClr val="F2F0EA"/>
+                </a:solidFill>
+                <a:latin typeface="Georgia" pitchFamily="34" charset="0"/>
+                <a:ea typeface="Georgia" pitchFamily="34" charset="-122"/>
+                <a:cs typeface="Georgia" pitchFamily="34" charset="-120"/>
+              </a:rPr>
+              <a:t>4.</a:t>
+            </a:r>
+            <a:pPr indent="0" marL="0">
+              <a:lnSpc>
+                <a:spcPct val="120000"/>
+              </a:lnSpc>
+              <a:spcAft>
+                <a:spcPts val="1000"/>
+              </a:spcAft>
+              <a:buNone/>
+            </a:pPr>
+            <a:r>
+              <a:rPr lang="en-US" sz="2300" dirty="0">
+                <a:solidFill>
+                  <a:srgbClr val="F2F0EA"/>
+                </a:solidFill>
+                <a:latin typeface="Georgia" pitchFamily="34" charset="0"/>
+                <a:ea typeface="Georgia" pitchFamily="34" charset="-122"/>
+                <a:cs typeface="Georgia" pitchFamily="34" charset="-120"/>
+              </a:rPr>
+              <a:t> resposta a uma objeção.</a:t>
             </a:r>
             <a:endParaRPr lang="en-US" sz="2300" dirty="0"/>
           </a:p>
@@ -2340,7 +2580,41 @@
                 <a:ea typeface="Arial" pitchFamily="34" charset="-122"/>
                 <a:cs typeface="Arial" pitchFamily="34" charset="-120"/>
               </a:rPr>
-              <a:t>A apresentação oral sobre um peixe do Sermão faz-se em grupos de dois ou três e dura três a quatro minutos: o que diz Vieira, com citação; o recurso que torna a crítica eficaz; um comportamento atual equivalente; a resposta a uma objeção.</a:t>
+              <a:t>A apresentação oral sobre um peixe do </a:t>
+            </a:r>
+            <a:pPr indent="0" marL="0">
+              <a:lnSpc>
+                <a:spcPct val="105000"/>
+              </a:lnSpc>
+              <a:buNone/>
+            </a:pPr>
+            <a:r>
+              <a:rPr lang="en-US" sz="2200" i="1" dirty="0">
+                <a:solidFill>
+                  <a:srgbClr val="F2F0EA"/>
+                </a:solidFill>
+                <a:latin typeface="Arial" pitchFamily="34" charset="0"/>
+                <a:ea typeface="Arial" pitchFamily="34" charset="-122"/>
+                <a:cs typeface="Arial" pitchFamily="34" charset="-120"/>
+              </a:rPr>
+              <a:t>Sermão</a:t>
+            </a:r>
+            <a:pPr indent="0" marL="0">
+              <a:lnSpc>
+                <a:spcPct val="105000"/>
+              </a:lnSpc>
+              <a:buNone/>
+            </a:pPr>
+            <a:r>
+              <a:rPr lang="en-US" sz="2200" dirty="0">
+                <a:solidFill>
+                  <a:srgbClr val="F2F0EA"/>
+                </a:solidFill>
+                <a:latin typeface="Arial" pitchFamily="34" charset="0"/>
+                <a:ea typeface="Arial" pitchFamily="34" charset="-122"/>
+                <a:cs typeface="Arial" pitchFamily="34" charset="-120"/>
+              </a:rPr>
+              <a:t> faz-se em grupos de dois ou três e dura três a quatro minutos: o que diz Vieira, com citação; o recurso que torna a crítica eficaz; um comportamento atual equivalente; a resposta a uma objeção.</a:t>
             </a:r>
             <a:endParaRPr lang="en-US" sz="2200" dirty="0"/>
           </a:p>
